--- a/docs/slides/pptx/05-closing.pptx
+++ b/docs/slides/pptx/05-closing.pptx
@@ -3911,7 +3911,7 @@
         <p:spPr>
           <a:xfrm>
             <a:off x="612648" y="1600200"/>
-            <a:ext cx="10966399" cy="4800600"/>
+            <a:ext cx="10966399" cy="4892040"/>
           </a:xfrm>
         </p:spPr>
         <p:txBody>
@@ -3983,7 +3983,7 @@
         <p:spPr>
           <a:xfrm>
             <a:off x="612648" y="1600200"/>
-            <a:ext cx="10966399" cy="4800600"/>
+            <a:ext cx="10966399" cy="4892040"/>
           </a:xfrm>
         </p:spPr>
         <p:txBody>
@@ -4069,7 +4069,7 @@
         <p:spPr>
           <a:xfrm>
             <a:off x="612648" y="1600200"/>
-            <a:ext cx="10966399" cy="4800600"/>
+            <a:ext cx="10966399" cy="4892040"/>
           </a:xfrm>
         </p:spPr>
         <p:txBody>
@@ -4169,7 +4169,7 @@
         <p:spPr>
           <a:xfrm>
             <a:off x="612648" y="1600200"/>
-            <a:ext cx="10966399" cy="4800600"/>
+            <a:ext cx="10966399" cy="4892040"/>
           </a:xfrm>
         </p:spPr>
         <p:txBody>
@@ -4262,7 +4262,7 @@
         <p:spPr>
           <a:xfrm>
             <a:off x="612648" y="1600200"/>
-            <a:ext cx="10966399" cy="4800600"/>
+            <a:ext cx="10966399" cy="4892040"/>
           </a:xfrm>
         </p:spPr>
         <p:txBody>
@@ -4341,7 +4341,7 @@
         <p:spPr>
           <a:xfrm>
             <a:off x="612648" y="1600200"/>
-            <a:ext cx="10966399" cy="4800600"/>
+            <a:ext cx="10966399" cy="4892040"/>
           </a:xfrm>
         </p:spPr>
         <p:txBody>
@@ -4441,7 +4441,7 @@
         <p:spPr>
           <a:xfrm>
             <a:off x="612648" y="1600200"/>
-            <a:ext cx="10966399" cy="4800600"/>
+            <a:ext cx="10966399" cy="4892040"/>
           </a:xfrm>
         </p:spPr>
         <p:txBody>
@@ -4548,7 +4548,7 @@
         <p:spPr>
           <a:xfrm>
             <a:off x="612648" y="1600200"/>
-            <a:ext cx="10966399" cy="4800600"/>
+            <a:ext cx="10966399" cy="4892040"/>
           </a:xfrm>
         </p:spPr>
         <p:txBody>
@@ -4641,7 +4641,7 @@
         <p:spPr>
           <a:xfrm>
             <a:off x="612648" y="1600200"/>
-            <a:ext cx="10966399" cy="4800600"/>
+            <a:ext cx="10966399" cy="4892040"/>
           </a:xfrm>
         </p:spPr>
         <p:txBody>
